--- a/manuscript/slides/the-gammas-w3d5-jaime-draft.pptx
+++ b/manuscript/slides/the-gammas-w3d5-jaime-draft.pptx
@@ -1251,18 +1251,25 @@
           <a:lstStyle/>
           <a:p>
             <a:r>
-              <a:t>No leer en la exposición principal. Cada experimento ataca respectivamente comparabilidad, coactivación, generalización y confusión vascular no controlada (CVR, señalada por Goutham el 22 jul).</a:t>
+              <a:t>No leer en la exposición principal. Cada experimento ataca comparabilidad, coactivación, generalización e independencia de tarea.</a:t>
             </a:r>
           </a:p>
           <a:p/>
           <a:p>
             <a:r>
-              <a:t>Evidencia: storyboard interno, slide 14; tabla claim–result–limitation citada y anclas de literatura seleccionadas (incl. Logothetis 2008 para el proxy hemodinámico del BOLD).</a:t>
-            </a:r>
-          </a:p>
-          <a:p>
-            <a:r>
-              <a:t>Caveat: son propuestas futuras, no análisis ya realizados; la conectividad de tarea puede contener coactivación y la transferencia actual depende de la misma tarea/HCP.</a:t>
+              <a:t>El cuarto es propuesta de Goutham Arcod (23 jul) y es EJECUTABLE con lo que ya tenemos: cohorte B trae 4 runs de reposo (4,4 GB ya descargados) y datasets.py expone load_rest_timeseries().</a:t>
+            </a:r>
+          </a:p>
+          <a:p/>
+          <a:p>
+            <a:r>
+              <a:t>Si preguntan por él: un resultado positivo probaría que la señal es INDEPENDIENTE DE LA TAREA, no que sea vascular — un rasgo estable puede ser materia gris o arousal basal. Calibración: Avery 2020 predice acc_2bk desde FC de reposo a r=0.20, así que que el reposo prediga algo es lo esperado; lo llamativo sería acercarse a 0.57.</a:t>
+            </a:r>
+          </a:p>
+          <a:p/>
+          <a:p>
+            <a:r>
+              <a:t>Caveat: son experimentos propuestos, no análisis realizados.</a:t>
             </a:r>
           </a:p>
         </p:txBody>
@@ -4843,7 +4850,7 @@
                 </a:solidFill>
                 <a:latin typeface="Poppins"/>
               </a:rPr>
-              <a:t>•  4. Control the activation contrast for vascular reactivity (CVR).</a:t>
+              <a:t>•  4. Run the activation model on resting-state amplitude — if rest predicts as well as task frames, the signal is task-independent.</a:t>
             </a:r>
           </a:p>
         </p:txBody>
